--- a/docs/free-rwe-resources/train-the-trainer/training/day-00-environment/kit/Participant-Handout.pptx
+++ b/docs/free-rwe-resources/train-the-trainer/training/day-00-environment/kit/Participant-Handout.pptx
@@ -9,6 +9,7 @@
     <p:sldId id="257" r:id="rId8"/>
     <p:sldId id="258" r:id="rId9"/>
     <p:sldId id="259" r:id="rId10"/>
+    <p:sldId id="260" r:id="rId11"/>
   </p:sldIdLst>
   <p:sldSz cx="12188952" cy="6858000" type="screen4x3"/>
   <p:notesSz cx="6858000" cy="9144000"/>
@@ -3106,7 +3107,7 @@
             <a:avLst/>
           </a:prstGeom>
           <a:solidFill>
-            <a:srgbClr val="4B2682"/>
+            <a:srgbClr val="20425A"/>
           </a:solidFill>
           <a:ln>
             <a:noFill/>
@@ -3149,7 +3150,7 @@
             <a:avLst/>
           </a:prstGeom>
           <a:solidFill>
-            <a:srgbClr val="7B4FA8"/>
+            <a:srgbClr val="904199"/>
           </a:solidFill>
           <a:ln>
             <a:noFill/>
@@ -3192,7 +3193,7 @@
             <a:avLst/>
           </a:prstGeom>
           <a:solidFill>
-            <a:srgbClr val="7B4FA8"/>
+            <a:srgbClr val="904199"/>
           </a:solidFill>
           <a:ln>
             <a:noFill/>
@@ -3235,7 +3236,7 @@
             <a:avLst/>
           </a:prstGeom>
           <a:solidFill>
-            <a:srgbClr val="7B4FA8"/>
+            <a:srgbClr val="904199"/>
           </a:solidFill>
           <a:ln>
             <a:noFill/>
@@ -3291,6 +3292,7 @@
                 <a:solidFill>
                   <a:srgbClr val="FFFFFF"/>
                 </a:solidFill>
+                <a:latin typeface="Gotham Narrow"/>
               </a:rPr>
               <a:t>MODULE 0</a:t>
             </a:r>
@@ -3325,6 +3327,7 @@
                 <a:solidFill>
                   <a:srgbClr val="FFFFFF"/>
                 </a:solidFill>
+                <a:latin typeface="Gotham Narrow"/>
               </a:rPr>
               <a:t>Environment Setup
 and Access</a:t>
@@ -3358,8 +3361,9 @@
             <a:r>
               <a:rPr sz="2200" b="0" i="0">
                 <a:solidFill>
-                  <a:srgbClr val="C8B4E6"/>
+                  <a:srgbClr val="D9C4E6"/>
                 </a:solidFill>
+                <a:latin typeface="Arial"/>
               </a:rPr>
               <a:t>Participant Handout · Complete before Day 1</a:t>
             </a:r>
@@ -3392,8 +3396,9 @@
             <a:r>
               <a:rPr sz="1300" b="0" i="0">
                 <a:solidFill>
-                  <a:srgbClr val="AA96CD"/>
+                  <a:srgbClr val="AEC4D2"/>
                 </a:solidFill>
+                <a:latin typeface="Arial"/>
               </a:rPr>
               <a:t>ALS TDI · OHDSI/OMOP Train-the-Trainer</a:t>
             </a:r>
@@ -3433,7 +3438,7 @@
             <a:avLst/>
           </a:prstGeom>
           <a:solidFill>
-            <a:srgbClr val="4B2682"/>
+            <a:srgbClr val="20425A"/>
           </a:solidFill>
           <a:ln>
             <a:noFill/>
@@ -3469,14 +3474,14 @@
         </p:nvSpPr>
         <p:spPr>
           <a:xfrm>
-            <a:off x="0" y="923544"/>
-            <a:ext cx="12188952" cy="36576"/>
+            <a:off x="0" y="905256"/>
+            <a:ext cx="12188952" cy="54864"/>
           </a:xfrm>
           <a:prstGeom prst="rect">
             <a:avLst/>
           </a:prstGeom>
           <a:solidFill>
-            <a:srgbClr val="7B4FA8"/>
+            <a:srgbClr val="904199"/>
           </a:solidFill>
           <a:ln>
             <a:noFill/>
@@ -3532,6 +3537,7 @@
                 <a:solidFill>
                   <a:srgbClr val="FFFFFF"/>
                 </a:solidFill>
+                <a:latin typeface="Gotham Narrow"/>
               </a:rPr>
               <a:t>Your Setup Checklist</a:t>
             </a:r>
@@ -3572,6 +3578,7 @@
                           <a:solidFill>
                             <a:srgbClr val="FFFFFF"/>
                           </a:solidFill>
+                          <a:latin typeface="Gotham Narrow"/>
                         </a:rPr>
                         <a:t>Item</a:t>
                       </a:r>
@@ -3579,7 +3586,7 @@
                   </a:txBody>
                   <a:tcPr>
                     <a:solidFill>
-                      <a:srgbClr val="4B2682"/>
+                      <a:srgbClr val="20425A"/>
                     </a:solidFill>
                   </a:tcPr>
                 </a:tc>
@@ -3593,6 +3600,7 @@
                           <a:solidFill>
                             <a:srgbClr val="FFFFFF"/>
                           </a:solidFill>
+                          <a:latin typeface="Gotham Narrow"/>
                         </a:rPr>
                         <a:t>What to Do</a:t>
                       </a:r>
@@ -3600,7 +3608,7 @@
                   </a:txBody>
                   <a:tcPr>
                     <a:solidFill>
-                      <a:srgbClr val="4B2682"/>
+                      <a:srgbClr val="20425A"/>
                     </a:solidFill>
                   </a:tcPr>
                 </a:tc>
@@ -3614,6 +3622,7 @@
                           <a:solidFill>
                             <a:srgbClr val="FFFFFF"/>
                           </a:solidFill>
+                          <a:latin typeface="Gotham Narrow"/>
                         </a:rPr>
                         <a:t>Status</a:t>
                       </a:r>
@@ -3621,7 +3630,7 @@
                   </a:txBody>
                   <a:tcPr>
                     <a:solidFill>
-                      <a:srgbClr val="4B2682"/>
+                      <a:srgbClr val="20425A"/>
                     </a:solidFill>
                   </a:tcPr>
                 </a:tc>
@@ -3637,6 +3646,7 @@
                           <a:solidFill>
                             <a:srgbClr val="191919"/>
                           </a:solidFill>
+                          <a:latin typeface="Arial"/>
                         </a:rPr>
                         <a:t>ATLAS Login</a:t>
                       </a:r>
@@ -3658,6 +3668,7 @@
                           <a:solidFill>
                             <a:srgbClr val="191919"/>
                           </a:solidFill>
+                          <a:latin typeface="Arial"/>
                         </a:rPr>
                         <a:t>Log in to your site's ATLAS and save a test concept set</a:t>
                       </a:r>
@@ -3679,6 +3690,7 @@
                           <a:solidFill>
                             <a:srgbClr val="191919"/>
                           </a:solidFill>
+                          <a:latin typeface="Arial"/>
                         </a:rPr>
                         <a:t>☐ Done  ☐ Blocked</a:t>
                       </a:r>
@@ -3702,6 +3714,7 @@
                           <a:solidFill>
                             <a:srgbClr val="191919"/>
                           </a:solidFill>
+                          <a:latin typeface="Arial"/>
                         </a:rPr>
                         <a:t>CDM SQL Access</a:t>
                       </a:r>
@@ -3723,6 +3736,7 @@
                           <a:solidFill>
                             <a:srgbClr val="191919"/>
                           </a:solidFill>
+                          <a:latin typeface="Arial"/>
                         </a:rPr>
                         <a:t>Run SELECT * FROM person LIMIT 5 in your SQL client</a:t>
                       </a:r>
@@ -3744,6 +3758,7 @@
                           <a:solidFill>
                             <a:srgbClr val="191919"/>
                           </a:solidFill>
+                          <a:latin typeface="Arial"/>
                         </a:rPr>
                         <a:t>☐ Done  ☐ Blocked</a:t>
                       </a:r>
@@ -3767,6 +3782,7 @@
                           <a:solidFill>
                             <a:srgbClr val="191919"/>
                           </a:solidFill>
+                          <a:latin typeface="Arial"/>
                         </a:rPr>
                         <a:t>Athena</a:t>
                       </a:r>
@@ -3788,6 +3804,7 @@
                           <a:solidFill>
                             <a:srgbClr val="191919"/>
                           </a:solidFill>
+                          <a:latin typeface="Arial"/>
                         </a:rPr>
                         <a:t>Open athena.ohdsi.org and search for Metformin</a:t>
                       </a:r>
@@ -3809,6 +3826,7 @@
                           <a:solidFill>
                             <a:srgbClr val="191919"/>
                           </a:solidFill>
+                          <a:latin typeface="Arial"/>
                         </a:rPr>
                         <a:t>☐ Done  ☐ Blocked</a:t>
                       </a:r>
@@ -3832,6 +3850,7 @@
                           <a:solidFill>
                             <a:srgbClr val="191919"/>
                           </a:solidFill>
+                          <a:latin typeface="Arial"/>
                         </a:rPr>
                         <a:t>SQL Client</a:t>
                       </a:r>
@@ -3853,6 +3872,7 @@
                           <a:solidFill>
                             <a:srgbClr val="191919"/>
                           </a:solidFill>
+                          <a:latin typeface="Arial"/>
                         </a:rPr>
                         <a:t>Connect to CDM in Databricks, DBeaver, or your site's client</a:t>
                       </a:r>
@@ -3874,6 +3894,7 @@
                           <a:solidFill>
                             <a:srgbClr val="191919"/>
                           </a:solidFill>
+                          <a:latin typeface="Arial"/>
                         </a:rPr>
                         <a:t>☐ Done  ☐ Blocked</a:t>
                       </a:r>
@@ -3897,6 +3918,7 @@
                           <a:solidFill>
                             <a:srgbClr val="191919"/>
                           </a:solidFill>
+                          <a:latin typeface="Arial"/>
                         </a:rPr>
                         <a:t>Git / GitHub</a:t>
                       </a:r>
@@ -3918,6 +3940,7 @@
                           <a:solidFill>
                             <a:srgbClr val="191919"/>
                           </a:solidFill>
+                          <a:latin typeface="Arial"/>
                         </a:rPr>
                         <a:t>Clone the program repo: git clone [repo-url]</a:t>
                       </a:r>
@@ -3939,6 +3962,7 @@
                           <a:solidFill>
                             <a:srgbClr val="191919"/>
                           </a:solidFill>
+                          <a:latin typeface="Arial"/>
                         </a:rPr>
                         <a:t>☐ Done  ☐ Blocked</a:t>
                       </a:r>
@@ -3962,6 +3986,7 @@
                           <a:solidFill>
                             <a:srgbClr val="191919"/>
                           </a:solidFill>
+                          <a:latin typeface="Arial"/>
                         </a:rPr>
                         <a:t>R / HADES (Day 6)</a:t>
                       </a:r>
@@ -3983,6 +4008,7 @@
                           <a:solidFill>
                             <a:srgbClr val="191919"/>
                           </a:solidFill>
+                          <a:latin typeface="Arial"/>
                         </a:rPr>
                         <a:t>Install DatabaseConnector and run library(DatabaseConnector)</a:t>
                       </a:r>
@@ -4004,6 +4030,7 @@
                           <a:solidFill>
                             <a:srgbClr val="191919"/>
                           </a:solidFill>
+                          <a:latin typeface="Arial"/>
                         </a:rPr>
                         <a:t>☐ Done  ☐ N/A</a:t>
                       </a:r>
@@ -4053,7 +4080,7 @@
             <a:avLst/>
           </a:prstGeom>
           <a:solidFill>
-            <a:srgbClr val="4B2682"/>
+            <a:srgbClr val="20425A"/>
           </a:solidFill>
           <a:ln>
             <a:noFill/>
@@ -4089,14 +4116,14 @@
         </p:nvSpPr>
         <p:spPr>
           <a:xfrm>
-            <a:off x="0" y="923544"/>
-            <a:ext cx="12188952" cy="36576"/>
+            <a:off x="0" y="905256"/>
+            <a:ext cx="12188952" cy="54864"/>
           </a:xfrm>
           <a:prstGeom prst="rect">
             <a:avLst/>
           </a:prstGeom>
           <a:solidFill>
-            <a:srgbClr val="7B4FA8"/>
+            <a:srgbClr val="904199"/>
           </a:solidFill>
           <a:ln>
             <a:noFill/>
@@ -4152,6 +4179,7 @@
                 <a:solidFill>
                   <a:srgbClr val="FFFFFF"/>
                 </a:solidFill>
+                <a:latin typeface="Gotham Narrow"/>
               </a:rPr>
               <a:t>Quick Verification Steps (Do Before Day 1)</a:t>
             </a:r>
@@ -4190,6 +4218,7 @@
                 <a:solidFill>
                   <a:srgbClr val="191919"/>
                 </a:solidFill>
+                <a:latin typeface="Arial"/>
               </a:rPr>
               <a:t>1.  Log in to ATLAS → create a test concept set → export JSON → delete it</a:t>
             </a:r>
@@ -4205,6 +4234,7 @@
                 <a:solidFill>
                   <a:srgbClr val="191919"/>
                 </a:solidFill>
+                <a:latin typeface="Arial"/>
               </a:rPr>
               <a:t>2.  Run in your SQL client: SELECT * FROM [cdm_schema].person LIMIT 5;</a:t>
             </a:r>
@@ -4220,6 +4250,7 @@
                 <a:solidFill>
                   <a:srgbClr val="191919"/>
                 </a:solidFill>
+                <a:latin typeface="Arial"/>
               </a:rPr>
               <a:t>3.  Open athena.ohdsi.org → search 'Metformin' → confirm results appear</a:t>
             </a:r>
@@ -4235,6 +4266,7 @@
                 <a:solidFill>
                   <a:srgbClr val="191919"/>
                 </a:solidFill>
+                <a:latin typeface="Arial"/>
               </a:rPr>
               <a:t>4.  In a terminal: git --version → should return a version number</a:t>
             </a:r>
@@ -4250,6 +4282,7 @@
                 <a:solidFill>
                   <a:srgbClr val="191919"/>
                 </a:solidFill>
+                <a:latin typeface="Arial"/>
               </a:rPr>
               <a:t>5.  Clone the program repository (URL from your trainer)</a:t>
             </a:r>
@@ -4265,6 +4298,7 @@
                 <a:solidFill>
                   <a:srgbClr val="191919"/>
                 </a:solidFill>
+                <a:latin typeface="Arial"/>
               </a:rPr>
               <a:t/>
             </a:r>
@@ -4280,6 +4314,7 @@
                 <a:solidFill>
                   <a:srgbClr val="191919"/>
                 </a:solidFill>
+                <a:latin typeface="Arial"/>
               </a:rPr>
               <a:t>If all five work → you are ready for Day 1</a:t>
             </a:r>
@@ -4295,6 +4330,7 @@
                 <a:solidFill>
                   <a:srgbClr val="191919"/>
                 </a:solidFill>
+                <a:latin typeface="Arial"/>
               </a:rPr>
               <a:t>If anything is blocked → contact your site support contact NOW</a:t>
             </a:r>
@@ -4334,7 +4370,7 @@
             <a:avLst/>
           </a:prstGeom>
           <a:solidFill>
-            <a:srgbClr val="4B2682"/>
+            <a:srgbClr val="20425A"/>
           </a:solidFill>
           <a:ln>
             <a:noFill/>
@@ -4370,14 +4406,14 @@
         </p:nvSpPr>
         <p:spPr>
           <a:xfrm>
-            <a:off x="0" y="923544"/>
-            <a:ext cx="12188952" cy="36576"/>
+            <a:off x="0" y="905256"/>
+            <a:ext cx="12188952" cy="54864"/>
           </a:xfrm>
           <a:prstGeom prst="rect">
             <a:avLst/>
           </a:prstGeom>
           <a:solidFill>
-            <a:srgbClr val="7B4FA8"/>
+            <a:srgbClr val="904199"/>
           </a:solidFill>
           <a:ln>
             <a:noFill/>
@@ -4433,6 +4469,7 @@
                 <a:solidFill>
                   <a:srgbClr val="FFFFFF"/>
                 </a:solidFill>
+                <a:latin typeface="Gotham Narrow"/>
               </a:rPr>
               <a:t>Your Site's Configuration (Fill In)</a:t>
             </a:r>
@@ -4471,6 +4508,7 @@
                 <a:solidFill>
                   <a:srgbClr val="191919"/>
                 </a:solidFill>
+                <a:latin typeface="Arial"/>
               </a:rPr>
               <a:t>ATLAS URL:   _______________________________________________</a:t>
             </a:r>
@@ -4486,6 +4524,7 @@
                 <a:solidFill>
                   <a:srgbClr val="191919"/>
                 </a:solidFill>
+                <a:latin typeface="Arial"/>
               </a:rPr>
               <a:t>Warehouse / CDM Host:   ____________________________________</a:t>
             </a:r>
@@ -4501,6 +4540,7 @@
                 <a:solidFill>
                   <a:srgbClr val="191919"/>
                 </a:solidFill>
+                <a:latin typeface="Arial"/>
               </a:rPr>
               <a:t>CDM Schema:   ______________________________________________</a:t>
             </a:r>
@@ -4516,6 +4556,7 @@
                 <a:solidFill>
                   <a:srgbClr val="191919"/>
                 </a:solidFill>
+                <a:latin typeface="Arial"/>
               </a:rPr>
               <a:t>Results Schema:   __________________________________________</a:t>
             </a:r>
@@ -4531,6 +4572,7 @@
                 <a:solidFill>
                   <a:srgbClr val="191919"/>
                 </a:solidFill>
+                <a:latin typeface="Arial"/>
               </a:rPr>
               <a:t>SQL Client (Databricks / DBeaver / other):   ________________</a:t>
             </a:r>
@@ -4546,6 +4588,7 @@
                 <a:solidFill>
                   <a:srgbClr val="191919"/>
                 </a:solidFill>
+                <a:latin typeface="Arial"/>
               </a:rPr>
               <a:t>Extraction Tool (SEARCH / Atlas SQL / pipeline):   __________</a:t>
             </a:r>
@@ -4561,6 +4604,7 @@
                 <a:solidFill>
                   <a:srgbClr val="191919"/>
                 </a:solidFill>
+                <a:latin typeface="Arial"/>
               </a:rPr>
               <a:t>Support Contact (data access):   ____________________________</a:t>
             </a:r>
@@ -4576,8 +4620,296 @@
                 <a:solidFill>
                   <a:srgbClr val="191919"/>
                 </a:solidFill>
+                <a:latin typeface="Arial"/>
               </a:rPr>
               <a:t>Support Contact (ATLAS admin):   ____________________________</a:t>
+            </a:r>
+          </a:p>
+        </p:txBody>
+      </p:sp>
+    </p:spTree>
+  </p:cSld>
+  <p:clrMapOvr>
+    <a:masterClrMapping/>
+  </p:clrMapOvr>
+</p:sld>
+</file>
+
+<file path=ppt/slides/slide5.xml><?xml version="1.0" encoding="utf-8"?>
+<p:sld xmlns:a="http://schemas.openxmlformats.org/drawingml/2006/main" xmlns:p="http://schemas.openxmlformats.org/presentationml/2006/main" xmlns:r="http://schemas.openxmlformats.org/officeDocument/2006/relationships">
+  <p:cSld>
+    <p:spTree>
+      <p:nvGrpSpPr>
+        <p:cNvPr id="1" name=""/>
+        <p:cNvGrpSpPr/>
+        <p:nvPr/>
+      </p:nvGrpSpPr>
+      <p:grpSpPr/>
+      <p:sp>
+        <p:nvSpPr>
+          <p:cNvPr id="2" name="Rectangle 1"/>
+          <p:cNvSpPr/>
+          <p:nvPr/>
+        </p:nvSpPr>
+        <p:spPr>
+          <a:xfrm>
+            <a:off x="0" y="0"/>
+            <a:ext cx="12188952" cy="6858000"/>
+          </a:xfrm>
+          <a:prstGeom prst="rect">
+            <a:avLst/>
+          </a:prstGeom>
+          <a:solidFill>
+            <a:srgbClr val="20425A"/>
+          </a:solidFill>
+          <a:ln>
+            <a:noFill/>
+          </a:ln>
+        </p:spPr>
+        <p:style>
+          <a:lnRef idx="1">
+            <a:schemeClr val="accent1"/>
+          </a:lnRef>
+          <a:fillRef idx="3">
+            <a:schemeClr val="accent1"/>
+          </a:fillRef>
+          <a:effectRef idx="2">
+            <a:schemeClr val="accent1"/>
+          </a:effectRef>
+          <a:fontRef idx="minor">
+            <a:schemeClr val="lt1"/>
+          </a:fontRef>
+        </p:style>
+        <p:txBody>
+          <a:bodyPr rtlCol="0" anchor="ctr"/>
+          <a:lstStyle/>
+          <a:p>
+            <a:pPr algn="ctr"/>
+          </a:p>
+        </p:txBody>
+      </p:sp>
+      <p:sp>
+        <p:nvSpPr>
+          <p:cNvPr id="3" name="Rectangle 2"/>
+          <p:cNvSpPr/>
+          <p:nvPr/>
+        </p:nvSpPr>
+        <p:spPr>
+          <a:xfrm>
+            <a:off x="0" y="0"/>
+            <a:ext cx="12188952" cy="64008"/>
+          </a:xfrm>
+          <a:prstGeom prst="rect">
+            <a:avLst/>
+          </a:prstGeom>
+          <a:solidFill>
+            <a:srgbClr val="904199"/>
+          </a:solidFill>
+          <a:ln>
+            <a:noFill/>
+          </a:ln>
+        </p:spPr>
+        <p:style>
+          <a:lnRef idx="1">
+            <a:schemeClr val="accent1"/>
+          </a:lnRef>
+          <a:fillRef idx="3">
+            <a:schemeClr val="accent1"/>
+          </a:fillRef>
+          <a:effectRef idx="2">
+            <a:schemeClr val="accent1"/>
+          </a:effectRef>
+          <a:fontRef idx="minor">
+            <a:schemeClr val="lt1"/>
+          </a:fontRef>
+        </p:style>
+        <p:txBody>
+          <a:bodyPr rtlCol="0" anchor="ctr"/>
+          <a:lstStyle/>
+          <a:p>
+            <a:pPr algn="ctr"/>
+          </a:p>
+        </p:txBody>
+      </p:sp>
+      <p:sp>
+        <p:nvSpPr>
+          <p:cNvPr id="4" name="Rectangle 3"/>
+          <p:cNvSpPr/>
+          <p:nvPr/>
+        </p:nvSpPr>
+        <p:spPr>
+          <a:xfrm>
+            <a:off x="0" y="6793992"/>
+            <a:ext cx="12188952" cy="64008"/>
+          </a:xfrm>
+          <a:prstGeom prst="rect">
+            <a:avLst/>
+          </a:prstGeom>
+          <a:solidFill>
+            <a:srgbClr val="904199"/>
+          </a:solidFill>
+          <a:ln>
+            <a:noFill/>
+          </a:ln>
+        </p:spPr>
+        <p:style>
+          <a:lnRef idx="1">
+            <a:schemeClr val="accent1"/>
+          </a:lnRef>
+          <a:fillRef idx="3">
+            <a:schemeClr val="accent1"/>
+          </a:fillRef>
+          <a:effectRef idx="2">
+            <a:schemeClr val="accent1"/>
+          </a:effectRef>
+          <a:fontRef idx="minor">
+            <a:schemeClr val="lt1"/>
+          </a:fontRef>
+        </p:style>
+        <p:txBody>
+          <a:bodyPr rtlCol="0" anchor="ctr"/>
+          <a:lstStyle/>
+          <a:p>
+            <a:pPr algn="ctr"/>
+          </a:p>
+        </p:txBody>
+      </p:sp>
+      <p:sp>
+        <p:nvSpPr>
+          <p:cNvPr id="5" name="TextBox 4"/>
+          <p:cNvSpPr txBox="1"/>
+          <p:nvPr/>
+        </p:nvSpPr>
+        <p:spPr>
+          <a:xfrm>
+            <a:off x="475488" y="1828800"/>
+            <a:ext cx="11237976" cy="1188720"/>
+          </a:xfrm>
+          <a:prstGeom prst="rect">
+            <a:avLst/>
+          </a:prstGeom>
+          <a:noFill/>
+        </p:spPr>
+        <p:txBody>
+          <a:bodyPr wrap="square">
+            <a:spAutoFit/>
+          </a:bodyPr>
+          <a:lstStyle/>
+          <a:p>
+            <a:pPr algn="l"/>
+            <a:r>
+              <a:rPr sz="4400" b="1" i="0">
+                <a:solidFill>
+                  <a:srgbClr val="FFFFFF"/>
+                </a:solidFill>
+                <a:latin typeface="Gotham Narrow"/>
+              </a:rPr>
+              <a:t>Thank You.  Questions?</a:t>
+            </a:r>
+          </a:p>
+        </p:txBody>
+      </p:sp>
+      <p:sp>
+        <p:nvSpPr>
+          <p:cNvPr id="6" name="TextBox 5"/>
+          <p:cNvSpPr txBox="1"/>
+          <p:nvPr/>
+        </p:nvSpPr>
+        <p:spPr>
+          <a:xfrm>
+            <a:off x="475488" y="3383280"/>
+            <a:ext cx="11237976" cy="640080"/>
+          </a:xfrm>
+          <a:prstGeom prst="rect">
+            <a:avLst/>
+          </a:prstGeom>
+          <a:noFill/>
+        </p:spPr>
+        <p:txBody>
+          <a:bodyPr wrap="square">
+            <a:spAutoFit/>
+          </a:bodyPr>
+          <a:lstStyle/>
+          <a:p>
+            <a:pPr algn="l"/>
+            <a:r>
+              <a:rPr sz="2400" b="0" i="0">
+                <a:solidFill>
+                  <a:srgbClr val="FFFFFF"/>
+                </a:solidFill>
+                <a:latin typeface="Arial"/>
+              </a:rPr>
+              <a:t>Danielle Boyce</a:t>
+            </a:r>
+          </a:p>
+        </p:txBody>
+      </p:sp>
+      <p:sp>
+        <p:nvSpPr>
+          <p:cNvPr id="7" name="TextBox 6"/>
+          <p:cNvSpPr txBox="1"/>
+          <p:nvPr/>
+        </p:nvSpPr>
+        <p:spPr>
+          <a:xfrm>
+            <a:off x="475488" y="3977639"/>
+            <a:ext cx="11237976" cy="640080"/>
+          </a:xfrm>
+          <a:prstGeom prst="rect">
+            <a:avLst/>
+          </a:prstGeom>
+          <a:noFill/>
+        </p:spPr>
+        <p:txBody>
+          <a:bodyPr wrap="square">
+            <a:spAutoFit/>
+          </a:bodyPr>
+          <a:lstStyle/>
+          <a:p>
+            <a:pPr algn="l"/>
+            <a:r>
+              <a:rPr sz="2200" b="0" i="0">
+                <a:solidFill>
+                  <a:srgbClr val="D9C4E6"/>
+                </a:solidFill>
+                <a:latin typeface="Arial"/>
+              </a:rPr>
+              <a:t>dboyce@als.net</a:t>
+            </a:r>
+          </a:p>
+        </p:txBody>
+      </p:sp>
+      <p:sp>
+        <p:nvSpPr>
+          <p:cNvPr id="8" name="TextBox 7"/>
+          <p:cNvSpPr txBox="1"/>
+          <p:nvPr/>
+        </p:nvSpPr>
+        <p:spPr>
+          <a:xfrm>
+            <a:off x="475488" y="6309360"/>
+            <a:ext cx="8229600" cy="365760"/>
+          </a:xfrm>
+          <a:prstGeom prst="rect">
+            <a:avLst/>
+          </a:prstGeom>
+          <a:noFill/>
+        </p:spPr>
+        <p:txBody>
+          <a:bodyPr wrap="square">
+            <a:spAutoFit/>
+          </a:bodyPr>
+          <a:lstStyle/>
+          <a:p>
+            <a:pPr algn="l"/>
+            <a:r>
+              <a:rPr sz="1300" b="0" i="0">
+                <a:solidFill>
+                  <a:srgbClr val="AEC4D2"/>
+                </a:solidFill>
+                <a:latin typeface="Arial"/>
+              </a:rPr>
+              <a:t>ALS TDI · OHDSI/OMOP Train-the-Trainer</a:t>
             </a:r>
           </a:p>
         </p:txBody>
